--- a/smoke_samples/13_connectors.pptx
+++ b/smoke_samples/13_connectors.pptx
@@ -229,7 +229,7 @@
         <p:spPr>
           <a:xfrm>
             <a:off x="457200" y="274638"/>
-            <a:ext cx="8230200" cy="1143000"/>
+            <a:ext cx="8229600" cy="1143000"/>
           </a:xfrm>
           <a:prstGeom prst="rect">
             <a:avLst/>
@@ -242,7 +242,7 @@
           <a:p>
             <a:pPr algn="l"/>
             <a:r>
-              <a:rPr lang="en-US" sz="4400" b="1" i="0" dirty="0"/>
+              <a:rPr lang="en-US" sz="4400" b="0" i="0" u="none" dirty="0"/>
               <a:t>Connectors</a:t>
             </a:r>
           </a:p>

--- a/smoke_samples/13_connectors.pptx
+++ b/smoke_samples/13_connectors.pptx
@@ -267,14 +267,14 @@
           </a:solidFill>
         </p:spPr>
         <p:txBody>
-          <a:bodyPr wrap="square" rtlCol="0" anchor="ctr">
+          <a:bodyPr wrap="square" rtlCol="0" anchor="ctr" marL="45720" marT="45720" marR="45720" marB="45720">
             <a:spAutoFit/>
           </a:bodyPr>
           <a:lstStyle/>
           <a:p>
             <a:pPr algn="ctr"/>
             <a:r>
-              <a:rPr lang="en-US" sz="2000" b="0" i="0" u="none" dirty="0">
+              <a:rPr lang="en-US" sz="1800" b="0" i="0" u="none" dirty="0">
                 <a:solidFill>
                   <a:srgbClr val="FFFFFF"/>
                 </a:solidFill>
@@ -303,14 +303,14 @@
           </a:solidFill>
         </p:spPr>
         <p:txBody>
-          <a:bodyPr wrap="square" rtlCol="0" anchor="ctr">
+          <a:bodyPr wrap="square" rtlCol="0" anchor="ctr" marL="45720" marT="45720" marR="45720" marB="45720">
             <a:spAutoFit/>
           </a:bodyPr>
           <a:lstStyle/>
           <a:p>
             <a:pPr algn="ctr"/>
             <a:r>
-              <a:rPr lang="en-US" sz="2000" b="0" i="0" u="none" dirty="0">
+              <a:rPr lang="en-US" sz="1800" b="0" i="0" u="none" dirty="0">
                 <a:solidFill>
                   <a:srgbClr val="000000"/>
                 </a:solidFill>

--- a/smoke_samples/13_connectors.pptx
+++ b/smoke_samples/13_connectors.pptx
@@ -201,11 +201,6 @@
 <file path=ppt/slides/slide1.xml><?xml version="1.0" encoding="utf-8"?>
 <p:sld xmlns:a="http://schemas.openxmlformats.org/drawingml/2006/main" xmlns:c="http://schemas.openxmlformats.org/drawingml/2006/chart" xmlns:r="http://schemas.openxmlformats.org/officeDocument/2006/relationships" xmlns:p="http://schemas.openxmlformats.org/presentationml/2006/main">
   <p:cSld>
-    <p:bg>
-      <p:bgRef idx="1001">
-        <a:schemeClr val="bg1"/>
-      </p:bgRef>
-    </p:bg>
     <p:spTree>
       <p:nvGrpSpPr>
         <p:cNvPr id="1" name=""/>
@@ -272,7 +267,7 @@
           </a:bodyPr>
           <a:lstStyle/>
           <a:p>
-            <a:pPr algn="ctr"/>
+            <a:pPr algn="l"/>
             <a:r>
               <a:rPr lang="en-US" sz="1800" b="0" i="0" u="none" dirty="0">
                 <a:solidFill>
@@ -308,7 +303,7 @@
           </a:bodyPr>
           <a:lstStyle/>
           <a:p>
-            <a:pPr algn="ctr"/>
+            <a:pPr algn="l"/>
             <a:r>
               <a:rPr lang="en-US" sz="1800" b="0" i="0" u="none" dirty="0">
                 <a:solidFill>
@@ -352,9 +347,9 @@
 </file>
 
 <file path=ppt/theme/theme1.xml><?xml version="1.0" encoding="utf-8"?>
-<a:theme xmlns:a="http://schemas.openxmlformats.org/drawingml/2006/main" name="Office Theme">
+<a:theme xmlns:a="http://schemas.openxmlformats.org/drawingml/2006/main" name="Office Theme marketing">
   <a:themeElements>
-    <a:clrScheme name="Office">
+    <a:clrScheme name="Office colors">
       <a:dk1>
         <a:sysClr val="windowText" lastClr="000000"/>
       </a:dk1>
@@ -392,7 +387,7 @@
         <a:srgbClr val="800080"/>
       </a:folHlink>
     </a:clrScheme>
-    <a:fontScheme name="Office">
+    <a:fontScheme name="Office fonts">
       <a:majorFont>
         <a:latin typeface="Calibri"/>
         <a:ea typeface=""/>

--- a/smoke_samples/13_connectors.pptx
+++ b/smoke_samples/13_connectors.pptx
@@ -251,8 +251,8 @@
         </p:nvSpPr>
         <p:spPr>
           <a:xfrm>
-            <a:off x="500000" y="2000000"/>
-            <a:ext cx="1500000" cy="800000"/>
+            <a:off x="500000" y="1828800"/>
+            <a:ext cx="1371600" cy="800000"/>
           </a:xfrm>
           <a:prstGeom prst="rect">
             <a:avLst/>
@@ -287,8 +287,8 @@
         </p:nvSpPr>
         <p:spPr>
           <a:xfrm>
-            <a:off x="4000000" y="2000000"/>
-            <a:ext cx="1500000" cy="800000"/>
+            <a:off x="3657600" y="1828800"/>
+            <a:ext cx="1371600" cy="800000"/>
           </a:xfrm>
           <a:prstGeom prst="rect">
             <a:avLst/>
@@ -324,8 +324,8 @@
         </p:nvCxnSpPr>
         <p:spPr>
           <a:xfrm>
-            <a:off x="2000000" y="2400000"/>
-            <a:ext cx="2000000" cy="0"/>
+            <a:off x="1828800" y="2400000"/>
+            <a:ext cx="1828800" cy="0"/>
           </a:xfrm>
           <a:prstGeom prst="straightConnector1">
             <a:avLst/>
